--- a/ゲーム科1年/00_前期/ゲームプログラミングⅠ/13_矩形と点の当たり判定_課題.pptx
+++ b/ゲーム科1年/00_前期/ゲームプログラミングⅠ/13_矩形と点の当たり判定_課題.pptx
@@ -5,7 +5,8 @@
     <p:sldMasterId id="2147483648" r:id="rId1"/>
   </p:sldMasterIdLst>
   <p:sldIdLst>
-    <p:sldId id="270" r:id="rId2"/>
+    <p:sldId id="262" r:id="rId2"/>
+    <p:sldId id="270" r:id="rId3"/>
   </p:sldIdLst>
   <p:sldSz cx="12192000" cy="6858000"/>
   <p:notesSz cx="6858000" cy="9144000"/>
@@ -259,7 +260,7 @@
           <a:p>
             <a:fld id="{E9CC885B-4903-4D54-9A93-00025F12DED9}" type="datetimeFigureOut">
               <a:rPr kumimoji="1" lang="ja-JP" altLang="en-US" smtClean="0"/>
-              <a:t>2024/12/4</a:t>
+              <a:t>2025/1/6</a:t>
             </a:fld>
             <a:endParaRPr kumimoji="1" lang="ja-JP" altLang="en-US"/>
           </a:p>
@@ -489,7 +490,7 @@
           <a:p>
             <a:fld id="{E9CC885B-4903-4D54-9A93-00025F12DED9}" type="datetimeFigureOut">
               <a:rPr kumimoji="1" lang="ja-JP" altLang="en-US" smtClean="0"/>
-              <a:t>2024/12/4</a:t>
+              <a:t>2025/1/6</a:t>
             </a:fld>
             <a:endParaRPr kumimoji="1" lang="ja-JP" altLang="en-US"/>
           </a:p>
@@ -729,7 +730,7 @@
           <a:p>
             <a:fld id="{E9CC885B-4903-4D54-9A93-00025F12DED9}" type="datetimeFigureOut">
               <a:rPr kumimoji="1" lang="ja-JP" altLang="en-US" smtClean="0"/>
-              <a:t>2024/12/4</a:t>
+              <a:t>2025/1/6</a:t>
             </a:fld>
             <a:endParaRPr kumimoji="1" lang="ja-JP" altLang="en-US"/>
           </a:p>
@@ -959,7 +960,7 @@
           <a:p>
             <a:fld id="{E9CC885B-4903-4D54-9A93-00025F12DED9}" type="datetimeFigureOut">
               <a:rPr kumimoji="1" lang="ja-JP" altLang="en-US" smtClean="0"/>
-              <a:t>2024/12/4</a:t>
+              <a:t>2025/1/6</a:t>
             </a:fld>
             <a:endParaRPr kumimoji="1" lang="ja-JP" altLang="en-US"/>
           </a:p>
@@ -1234,7 +1235,7 @@
           <a:p>
             <a:fld id="{E9CC885B-4903-4D54-9A93-00025F12DED9}" type="datetimeFigureOut">
               <a:rPr kumimoji="1" lang="ja-JP" altLang="en-US" smtClean="0"/>
-              <a:t>2024/12/4</a:t>
+              <a:t>2025/1/6</a:t>
             </a:fld>
             <a:endParaRPr kumimoji="1" lang="ja-JP" altLang="en-US"/>
           </a:p>
@@ -1563,7 +1564,7 @@
           <a:p>
             <a:fld id="{E9CC885B-4903-4D54-9A93-00025F12DED9}" type="datetimeFigureOut">
               <a:rPr kumimoji="1" lang="ja-JP" altLang="en-US" smtClean="0"/>
-              <a:t>2024/12/4</a:t>
+              <a:t>2025/1/6</a:t>
             </a:fld>
             <a:endParaRPr kumimoji="1" lang="ja-JP" altLang="en-US"/>
           </a:p>
@@ -2039,7 +2040,7 @@
           <a:p>
             <a:fld id="{E9CC885B-4903-4D54-9A93-00025F12DED9}" type="datetimeFigureOut">
               <a:rPr kumimoji="1" lang="ja-JP" altLang="en-US" smtClean="0"/>
-              <a:t>2024/12/4</a:t>
+              <a:t>2025/1/6</a:t>
             </a:fld>
             <a:endParaRPr kumimoji="1" lang="ja-JP" altLang="en-US"/>
           </a:p>
@@ -2180,7 +2181,7 @@
           <a:p>
             <a:fld id="{E9CC885B-4903-4D54-9A93-00025F12DED9}" type="datetimeFigureOut">
               <a:rPr kumimoji="1" lang="ja-JP" altLang="en-US" smtClean="0"/>
-              <a:t>2024/12/4</a:t>
+              <a:t>2025/1/6</a:t>
             </a:fld>
             <a:endParaRPr kumimoji="1" lang="ja-JP" altLang="en-US"/>
           </a:p>
@@ -2293,7 +2294,7 @@
           <a:p>
             <a:fld id="{E9CC885B-4903-4D54-9A93-00025F12DED9}" type="datetimeFigureOut">
               <a:rPr kumimoji="1" lang="ja-JP" altLang="en-US" smtClean="0"/>
-              <a:t>2024/12/4</a:t>
+              <a:t>2025/1/6</a:t>
             </a:fld>
             <a:endParaRPr kumimoji="1" lang="ja-JP" altLang="en-US"/>
           </a:p>
@@ -2636,7 +2637,7 @@
           <a:p>
             <a:fld id="{E9CC885B-4903-4D54-9A93-00025F12DED9}" type="datetimeFigureOut">
               <a:rPr kumimoji="1" lang="ja-JP" altLang="en-US" smtClean="0"/>
-              <a:t>2024/12/4</a:t>
+              <a:t>2025/1/6</a:t>
             </a:fld>
             <a:endParaRPr kumimoji="1" lang="ja-JP" altLang="en-US"/>
           </a:p>
@@ -2924,7 +2925,7 @@
           <a:p>
             <a:fld id="{E9CC885B-4903-4D54-9A93-00025F12DED9}" type="datetimeFigureOut">
               <a:rPr kumimoji="1" lang="ja-JP" altLang="en-US" smtClean="0"/>
-              <a:t>2024/12/4</a:t>
+              <a:t>2025/1/6</a:t>
             </a:fld>
             <a:endParaRPr kumimoji="1" lang="ja-JP" altLang="en-US"/>
           </a:p>
@@ -3197,7 +3198,7 @@
           <a:p>
             <a:fld id="{E9CC885B-4903-4D54-9A93-00025F12DED9}" type="datetimeFigureOut">
               <a:rPr kumimoji="1" lang="ja-JP" altLang="en-US" smtClean="0"/>
-              <a:t>2024/12/4</a:t>
+              <a:t>2025/1/6</a:t>
             </a:fld>
             <a:endParaRPr kumimoji="1" lang="ja-JP" altLang="en-US"/>
           </a:p>
@@ -3664,6 +3665,265 @@
         <p:spPr>
           <a:xfrm>
             <a:off x="567542" y="1216429"/>
+            <a:ext cx="9979014" cy="1200329"/>
+          </a:xfrm>
+          <a:prstGeom prst="rect">
+            <a:avLst/>
+          </a:prstGeom>
+          <a:noFill/>
+        </p:spPr>
+        <p:txBody>
+          <a:bodyPr wrap="none" rtlCol="0">
+            <a:spAutoFit/>
+          </a:bodyPr>
+          <a:lstStyle/>
+          <a:p>
+            <a:r>
+              <a:rPr kumimoji="1" lang="en-US" altLang="ja-JP" sz="2400" b="1" dirty="0">
+                <a:solidFill>
+                  <a:srgbClr val="FF0000"/>
+                </a:solidFill>
+              </a:rPr>
+              <a:t>Player</a:t>
+            </a:r>
+            <a:r>
+              <a:rPr kumimoji="1" lang="ja-JP" altLang="en-US" sz="2400" b="1" dirty="0">
+                <a:solidFill>
+                  <a:srgbClr val="FF0000"/>
+                </a:solidFill>
+              </a:rPr>
+              <a:t>を参考に、</a:t>
+            </a:r>
+            <a:r>
+              <a:rPr kumimoji="1" lang="en-US" altLang="ja-JP" sz="2400" b="1" dirty="0" err="1">
+                <a:solidFill>
+                  <a:srgbClr val="FF0000"/>
+                </a:solidFill>
+              </a:rPr>
+              <a:t>BlueEnemy</a:t>
+            </a:r>
+            <a:r>
+              <a:rPr lang="ja-JP" altLang="en-US" sz="2400" b="1" dirty="0">
+                <a:solidFill>
+                  <a:srgbClr val="FF0000"/>
+                </a:solidFill>
+              </a:rPr>
+              <a:t>の情報を</a:t>
+            </a:r>
+            <a:r>
+              <a:rPr lang="en-US" altLang="ja-JP" sz="2400" b="1" dirty="0" err="1">
+                <a:solidFill>
+                  <a:srgbClr val="FF0000"/>
+                </a:solidFill>
+              </a:rPr>
+              <a:t>CheckCollision</a:t>
+            </a:r>
+            <a:r>
+              <a:rPr lang="ja-JP" altLang="en-US" sz="2400" b="1" dirty="0">
+                <a:solidFill>
+                  <a:srgbClr val="FF0000"/>
+                </a:solidFill>
+              </a:rPr>
+              <a:t>関数で取得</a:t>
+            </a:r>
+            <a:r>
+              <a:rPr lang="ja-JP" altLang="en-US" sz="2400" dirty="0"/>
+              <a:t>し、</a:t>
+            </a:r>
+            <a:endParaRPr lang="en-US" altLang="ja-JP" sz="2400" dirty="0"/>
+          </a:p>
+          <a:p>
+            <a:r>
+              <a:rPr kumimoji="1" lang="en-US" altLang="ja-JP" sz="2400" dirty="0" err="1"/>
+              <a:t>BlueEnemy</a:t>
+            </a:r>
+            <a:r>
+              <a:rPr kumimoji="1" lang="ja-JP" altLang="en-US" sz="2400" dirty="0"/>
+              <a:t>とマウスポインタの当たり判定を取りましょう。</a:t>
+            </a:r>
+            <a:endParaRPr kumimoji="1" lang="en-US" altLang="ja-JP" sz="2400" dirty="0"/>
+          </a:p>
+          <a:p>
+            <a:r>
+              <a:rPr kumimoji="1" lang="ja-JP" altLang="en-US" sz="2400" dirty="0"/>
+              <a:t>当たったら、</a:t>
+            </a:r>
+            <a:r>
+              <a:rPr kumimoji="1" lang="en-US" altLang="ja-JP" sz="2400" dirty="0"/>
+              <a:t>Player</a:t>
+            </a:r>
+            <a:r>
+              <a:rPr kumimoji="1" lang="ja-JP" altLang="en-US" sz="2400" dirty="0"/>
+              <a:t>と同様に当たった旨の文字を描画しましょう。</a:t>
+            </a:r>
+            <a:endParaRPr kumimoji="1" lang="en-US" altLang="ja-JP" sz="2400" dirty="0"/>
+          </a:p>
+        </p:txBody>
+      </p:sp>
+      <p:pic>
+        <p:nvPicPr>
+          <p:cNvPr id="3" name="図 2">
+            <a:extLst>
+              <a:ext uri="{FF2B5EF4-FFF2-40B4-BE49-F238E27FC236}">
+                <a16:creationId xmlns:a16="http://schemas.microsoft.com/office/drawing/2014/main" id="{A19E06A3-AEB3-4A3F-911B-981B81C7868F}"/>
+              </a:ext>
+            </a:extLst>
+          </p:cNvPr>
+          <p:cNvPicPr>
+            <a:picLocks noChangeAspect="1"/>
+          </p:cNvPicPr>
+          <p:nvPr/>
+        </p:nvPicPr>
+        <p:blipFill>
+          <a:blip r:embed="rId2"/>
+          <a:stretch>
+            <a:fillRect/>
+          </a:stretch>
+        </p:blipFill>
+        <p:spPr>
+          <a:xfrm>
+            <a:off x="567542" y="2556458"/>
+            <a:ext cx="3665791" cy="3805518"/>
+          </a:xfrm>
+          <a:prstGeom prst="rect">
+            <a:avLst/>
+          </a:prstGeom>
+        </p:spPr>
+      </p:pic>
+      <p:sp>
+        <p:nvSpPr>
+          <p:cNvPr id="5" name="矢印: 下 4">
+            <a:extLst>
+              <a:ext uri="{FF2B5EF4-FFF2-40B4-BE49-F238E27FC236}">
+                <a16:creationId xmlns:a16="http://schemas.microsoft.com/office/drawing/2014/main" id="{DB5D8667-D6D5-4B5C-A219-C2A3F7BEBB55}"/>
+              </a:ext>
+            </a:extLst>
+          </p:cNvPr>
+          <p:cNvSpPr/>
+          <p:nvPr/>
+        </p:nvSpPr>
+        <p:spPr>
+          <a:xfrm rot="8602307">
+            <a:off x="2458653" y="5669531"/>
+            <a:ext cx="177800" cy="254000"/>
+          </a:xfrm>
+          <a:prstGeom prst="downArrow">
+            <a:avLst/>
+          </a:prstGeom>
+          <a:solidFill>
+            <a:schemeClr val="bg1"/>
+          </a:solidFill>
+          <a:ln>
+            <a:solidFill>
+              <a:schemeClr val="tx1"/>
+            </a:solidFill>
+          </a:ln>
+        </p:spPr>
+        <p:style>
+          <a:lnRef idx="2">
+            <a:schemeClr val="accent1">
+              <a:shade val="50000"/>
+            </a:schemeClr>
+          </a:lnRef>
+          <a:fillRef idx="1">
+            <a:schemeClr val="accent1"/>
+          </a:fillRef>
+          <a:effectRef idx="0">
+            <a:schemeClr val="accent1"/>
+          </a:effectRef>
+          <a:fontRef idx="minor">
+            <a:schemeClr val="lt1"/>
+          </a:fontRef>
+        </p:style>
+        <p:txBody>
+          <a:bodyPr rtlCol="0" anchor="ctr"/>
+          <a:lstStyle/>
+          <a:p>
+            <a:pPr algn="ctr"/>
+            <a:endParaRPr kumimoji="1" lang="ja-JP" altLang="en-US"/>
+          </a:p>
+        </p:txBody>
+      </p:sp>
+    </p:spTree>
+    <p:extLst>
+      <p:ext uri="{BB962C8B-B14F-4D97-AF65-F5344CB8AC3E}">
+        <p14:creationId xmlns:p14="http://schemas.microsoft.com/office/powerpoint/2010/main" val="3696219093"/>
+      </p:ext>
+    </p:extLst>
+  </p:cSld>
+  <p:clrMapOvr>
+    <a:masterClrMapping/>
+  </p:clrMapOvr>
+</p:sld>
+</file>
+
+<file path=ppt/slides/slide2.xml><?xml version="1.0" encoding="utf-8"?>
+<p:sld xmlns:a="http://schemas.openxmlformats.org/drawingml/2006/main" xmlns:r="http://schemas.openxmlformats.org/officeDocument/2006/relationships" xmlns:p="http://schemas.openxmlformats.org/presentationml/2006/main">
+  <p:cSld>
+    <p:spTree>
+      <p:nvGrpSpPr>
+        <p:cNvPr id="1" name=""/>
+        <p:cNvGrpSpPr/>
+        <p:nvPr/>
+      </p:nvGrpSpPr>
+      <p:grpSpPr>
+        <a:xfrm>
+          <a:off x="0" y="0"/>
+          <a:ext cx="0" cy="0"/>
+          <a:chOff x="0" y="0"/>
+          <a:chExt cx="0" cy="0"/>
+        </a:xfrm>
+      </p:grpSpPr>
+      <p:sp>
+        <p:nvSpPr>
+          <p:cNvPr id="4" name="テキスト ボックス 3">
+            <a:extLst>
+              <a:ext uri="{FF2B5EF4-FFF2-40B4-BE49-F238E27FC236}">
+                <a16:creationId xmlns:a16="http://schemas.microsoft.com/office/drawing/2014/main" id="{5A13BF46-B8C5-48AA-8308-C9ECFF431A18}"/>
+              </a:ext>
+            </a:extLst>
+          </p:cNvPr>
+          <p:cNvSpPr txBox="1"/>
+          <p:nvPr/>
+        </p:nvSpPr>
+        <p:spPr>
+          <a:xfrm>
+            <a:off x="567542" y="491954"/>
+            <a:ext cx="5226111" cy="584775"/>
+          </a:xfrm>
+          <a:prstGeom prst="rect">
+            <a:avLst/>
+          </a:prstGeom>
+          <a:noFill/>
+        </p:spPr>
+        <p:txBody>
+          <a:bodyPr wrap="none" rtlCol="0">
+            <a:spAutoFit/>
+          </a:bodyPr>
+          <a:lstStyle/>
+          <a:p>
+            <a:r>
+              <a:rPr kumimoji="1" lang="ja-JP" altLang="en-US" sz="3200" b="1" u="sng" dirty="0"/>
+              <a:t>矩形と点の当たり判定 課題</a:t>
+            </a:r>
+          </a:p>
+        </p:txBody>
+      </p:sp>
+      <p:sp>
+        <p:nvSpPr>
+          <p:cNvPr id="6" name="テキスト ボックス 5">
+            <a:extLst>
+              <a:ext uri="{FF2B5EF4-FFF2-40B4-BE49-F238E27FC236}">
+                <a16:creationId xmlns:a16="http://schemas.microsoft.com/office/drawing/2014/main" id="{55830AD6-028B-4C4E-80BF-B70DFC1C3A46}"/>
+              </a:ext>
+            </a:extLst>
+          </p:cNvPr>
+          <p:cNvSpPr txBox="1"/>
+          <p:nvPr/>
+        </p:nvSpPr>
+        <p:spPr>
+          <a:xfrm>
+            <a:off x="567542" y="1216429"/>
             <a:ext cx="9390712" cy="4154984"/>
           </a:xfrm>
           <a:prstGeom prst="rect">

--- a/ゲーム科1年/00_前期/ゲームプログラミングⅠ/13_矩形と点の当たり判定_課題.pptx
+++ b/ゲーム科1年/00_前期/ゲームプログラミングⅠ/13_矩形と点の当たり判定_課題.pptx
@@ -260,7 +260,7 @@
           <a:p>
             <a:fld id="{E9CC885B-4903-4D54-9A93-00025F12DED9}" type="datetimeFigureOut">
               <a:rPr kumimoji="1" lang="ja-JP" altLang="en-US" smtClean="0"/>
-              <a:t>2025/1/6</a:t>
+              <a:t>2026/6/4</a:t>
             </a:fld>
             <a:endParaRPr kumimoji="1" lang="ja-JP" altLang="en-US"/>
           </a:p>
@@ -490,7 +490,7 @@
           <a:p>
             <a:fld id="{E9CC885B-4903-4D54-9A93-00025F12DED9}" type="datetimeFigureOut">
               <a:rPr kumimoji="1" lang="ja-JP" altLang="en-US" smtClean="0"/>
-              <a:t>2025/1/6</a:t>
+              <a:t>2026/6/4</a:t>
             </a:fld>
             <a:endParaRPr kumimoji="1" lang="ja-JP" altLang="en-US"/>
           </a:p>
@@ -730,7 +730,7 @@
           <a:p>
             <a:fld id="{E9CC885B-4903-4D54-9A93-00025F12DED9}" type="datetimeFigureOut">
               <a:rPr kumimoji="1" lang="ja-JP" altLang="en-US" smtClean="0"/>
-              <a:t>2025/1/6</a:t>
+              <a:t>2026/6/4</a:t>
             </a:fld>
             <a:endParaRPr kumimoji="1" lang="ja-JP" altLang="en-US"/>
           </a:p>
@@ -960,7 +960,7 @@
           <a:p>
             <a:fld id="{E9CC885B-4903-4D54-9A93-00025F12DED9}" type="datetimeFigureOut">
               <a:rPr kumimoji="1" lang="ja-JP" altLang="en-US" smtClean="0"/>
-              <a:t>2025/1/6</a:t>
+              <a:t>2026/6/4</a:t>
             </a:fld>
             <a:endParaRPr kumimoji="1" lang="ja-JP" altLang="en-US"/>
           </a:p>
@@ -1235,7 +1235,7 @@
           <a:p>
             <a:fld id="{E9CC885B-4903-4D54-9A93-00025F12DED9}" type="datetimeFigureOut">
               <a:rPr kumimoji="1" lang="ja-JP" altLang="en-US" smtClean="0"/>
-              <a:t>2025/1/6</a:t>
+              <a:t>2026/6/4</a:t>
             </a:fld>
             <a:endParaRPr kumimoji="1" lang="ja-JP" altLang="en-US"/>
           </a:p>
@@ -1564,7 +1564,7 @@
           <a:p>
             <a:fld id="{E9CC885B-4903-4D54-9A93-00025F12DED9}" type="datetimeFigureOut">
               <a:rPr kumimoji="1" lang="ja-JP" altLang="en-US" smtClean="0"/>
-              <a:t>2025/1/6</a:t>
+              <a:t>2026/6/4</a:t>
             </a:fld>
             <a:endParaRPr kumimoji="1" lang="ja-JP" altLang="en-US"/>
           </a:p>
@@ -2040,7 +2040,7 @@
           <a:p>
             <a:fld id="{E9CC885B-4903-4D54-9A93-00025F12DED9}" type="datetimeFigureOut">
               <a:rPr kumimoji="1" lang="ja-JP" altLang="en-US" smtClean="0"/>
-              <a:t>2025/1/6</a:t>
+              <a:t>2026/6/4</a:t>
             </a:fld>
             <a:endParaRPr kumimoji="1" lang="ja-JP" altLang="en-US"/>
           </a:p>
@@ -2181,7 +2181,7 @@
           <a:p>
             <a:fld id="{E9CC885B-4903-4D54-9A93-00025F12DED9}" type="datetimeFigureOut">
               <a:rPr kumimoji="1" lang="ja-JP" altLang="en-US" smtClean="0"/>
-              <a:t>2025/1/6</a:t>
+              <a:t>2026/6/4</a:t>
             </a:fld>
             <a:endParaRPr kumimoji="1" lang="ja-JP" altLang="en-US"/>
           </a:p>
@@ -2294,7 +2294,7 @@
           <a:p>
             <a:fld id="{E9CC885B-4903-4D54-9A93-00025F12DED9}" type="datetimeFigureOut">
               <a:rPr kumimoji="1" lang="ja-JP" altLang="en-US" smtClean="0"/>
-              <a:t>2025/1/6</a:t>
+              <a:t>2026/6/4</a:t>
             </a:fld>
             <a:endParaRPr kumimoji="1" lang="ja-JP" altLang="en-US"/>
           </a:p>
@@ -2637,7 +2637,7 @@
           <a:p>
             <a:fld id="{E9CC885B-4903-4D54-9A93-00025F12DED9}" type="datetimeFigureOut">
               <a:rPr kumimoji="1" lang="ja-JP" altLang="en-US" smtClean="0"/>
-              <a:t>2025/1/6</a:t>
+              <a:t>2026/6/4</a:t>
             </a:fld>
             <a:endParaRPr kumimoji="1" lang="ja-JP" altLang="en-US"/>
           </a:p>
@@ -2925,7 +2925,7 @@
           <a:p>
             <a:fld id="{E9CC885B-4903-4D54-9A93-00025F12DED9}" type="datetimeFigureOut">
               <a:rPr kumimoji="1" lang="ja-JP" altLang="en-US" smtClean="0"/>
-              <a:t>2025/1/6</a:t>
+              <a:t>2026/6/4</a:t>
             </a:fld>
             <a:endParaRPr kumimoji="1" lang="ja-JP" altLang="en-US"/>
           </a:p>
@@ -3198,7 +3198,7 @@
           <a:p>
             <a:fld id="{E9CC885B-4903-4D54-9A93-00025F12DED9}" type="datetimeFigureOut">
               <a:rPr kumimoji="1" lang="ja-JP" altLang="en-US" smtClean="0"/>
-              <a:t>2025/1/6</a:t>
+              <a:t>2026/6/4</a:t>
             </a:fld>
             <a:endParaRPr kumimoji="1" lang="ja-JP" altLang="en-US"/>
           </a:p>
@@ -3630,7 +3630,7 @@
         <p:spPr>
           <a:xfrm>
             <a:off x="567542" y="491954"/>
-            <a:ext cx="5226111" cy="584775"/>
+            <a:ext cx="5636479" cy="584775"/>
           </a:xfrm>
           <a:prstGeom prst="rect">
             <a:avLst/>
@@ -3645,7 +3645,7 @@
           <a:p>
             <a:r>
               <a:rPr kumimoji="1" lang="ja-JP" altLang="en-US" sz="3200" b="1" u="sng" dirty="0"/>
-              <a:t>矩形と点の当たり判定 課題</a:t>
+              <a:t>矩形と点の当たり判定 課題１</a:t>
             </a:r>
           </a:p>
         </p:txBody>
@@ -3889,7 +3889,7 @@
         <p:spPr>
           <a:xfrm>
             <a:off x="567542" y="491954"/>
-            <a:ext cx="5226111" cy="584775"/>
+            <a:ext cx="5636479" cy="584775"/>
           </a:xfrm>
           <a:prstGeom prst="rect">
             <a:avLst/>
@@ -3904,8 +3904,13 @@
           <a:p>
             <a:r>
               <a:rPr kumimoji="1" lang="ja-JP" altLang="en-US" sz="3200" b="1" u="sng" dirty="0"/>
-              <a:t>矩形と点の当たり判定 課題</a:t>
-            </a:r>
+              <a:t>矩形と点の当たり</a:t>
+            </a:r>
+            <a:r>
+              <a:rPr kumimoji="1" lang="ja-JP" altLang="en-US" sz="3200" b="1" u="sng"/>
+              <a:t>判定 課題２</a:t>
+            </a:r>
+            <a:endParaRPr kumimoji="1" lang="ja-JP" altLang="en-US" sz="3200" b="1" u="sng" dirty="0"/>
           </a:p>
         </p:txBody>
       </p:sp>

--- a/ゲーム科1年/00_前期/ゲームプログラミングⅠ/13_矩形と点の当たり判定_課題.pptx
+++ b/ゲーム科1年/00_前期/ゲームプログラミングⅠ/13_矩形と点の当たり判定_課題.pptx
@@ -260,7 +260,7 @@
           <a:p>
             <a:fld id="{E9CC885B-4903-4D54-9A93-00025F12DED9}" type="datetimeFigureOut">
               <a:rPr kumimoji="1" lang="ja-JP" altLang="en-US" smtClean="0"/>
-              <a:t>2025/1/6</a:t>
+              <a:t>2026/3/18</a:t>
             </a:fld>
             <a:endParaRPr kumimoji="1" lang="ja-JP" altLang="en-US"/>
           </a:p>
@@ -490,7 +490,7 @@
           <a:p>
             <a:fld id="{E9CC885B-4903-4D54-9A93-00025F12DED9}" type="datetimeFigureOut">
               <a:rPr kumimoji="1" lang="ja-JP" altLang="en-US" smtClean="0"/>
-              <a:t>2025/1/6</a:t>
+              <a:t>2026/3/18</a:t>
             </a:fld>
             <a:endParaRPr kumimoji="1" lang="ja-JP" altLang="en-US"/>
           </a:p>
@@ -730,7 +730,7 @@
           <a:p>
             <a:fld id="{E9CC885B-4903-4D54-9A93-00025F12DED9}" type="datetimeFigureOut">
               <a:rPr kumimoji="1" lang="ja-JP" altLang="en-US" smtClean="0"/>
-              <a:t>2025/1/6</a:t>
+              <a:t>2026/3/18</a:t>
             </a:fld>
             <a:endParaRPr kumimoji="1" lang="ja-JP" altLang="en-US"/>
           </a:p>
@@ -960,7 +960,7 @@
           <a:p>
             <a:fld id="{E9CC885B-4903-4D54-9A93-00025F12DED9}" type="datetimeFigureOut">
               <a:rPr kumimoji="1" lang="ja-JP" altLang="en-US" smtClean="0"/>
-              <a:t>2025/1/6</a:t>
+              <a:t>2026/3/18</a:t>
             </a:fld>
             <a:endParaRPr kumimoji="1" lang="ja-JP" altLang="en-US"/>
           </a:p>
@@ -1235,7 +1235,7 @@
           <a:p>
             <a:fld id="{E9CC885B-4903-4D54-9A93-00025F12DED9}" type="datetimeFigureOut">
               <a:rPr kumimoji="1" lang="ja-JP" altLang="en-US" smtClean="0"/>
-              <a:t>2025/1/6</a:t>
+              <a:t>2026/3/18</a:t>
             </a:fld>
             <a:endParaRPr kumimoji="1" lang="ja-JP" altLang="en-US"/>
           </a:p>
@@ -1564,7 +1564,7 @@
           <a:p>
             <a:fld id="{E9CC885B-4903-4D54-9A93-00025F12DED9}" type="datetimeFigureOut">
               <a:rPr kumimoji="1" lang="ja-JP" altLang="en-US" smtClean="0"/>
-              <a:t>2025/1/6</a:t>
+              <a:t>2026/3/18</a:t>
             </a:fld>
             <a:endParaRPr kumimoji="1" lang="ja-JP" altLang="en-US"/>
           </a:p>
@@ -2040,7 +2040,7 @@
           <a:p>
             <a:fld id="{E9CC885B-4903-4D54-9A93-00025F12DED9}" type="datetimeFigureOut">
               <a:rPr kumimoji="1" lang="ja-JP" altLang="en-US" smtClean="0"/>
-              <a:t>2025/1/6</a:t>
+              <a:t>2026/3/18</a:t>
             </a:fld>
             <a:endParaRPr kumimoji="1" lang="ja-JP" altLang="en-US"/>
           </a:p>
@@ -2181,7 +2181,7 @@
           <a:p>
             <a:fld id="{E9CC885B-4903-4D54-9A93-00025F12DED9}" type="datetimeFigureOut">
               <a:rPr kumimoji="1" lang="ja-JP" altLang="en-US" smtClean="0"/>
-              <a:t>2025/1/6</a:t>
+              <a:t>2026/3/18</a:t>
             </a:fld>
             <a:endParaRPr kumimoji="1" lang="ja-JP" altLang="en-US"/>
           </a:p>
@@ -2294,7 +2294,7 @@
           <a:p>
             <a:fld id="{E9CC885B-4903-4D54-9A93-00025F12DED9}" type="datetimeFigureOut">
               <a:rPr kumimoji="1" lang="ja-JP" altLang="en-US" smtClean="0"/>
-              <a:t>2025/1/6</a:t>
+              <a:t>2026/3/18</a:t>
             </a:fld>
             <a:endParaRPr kumimoji="1" lang="ja-JP" altLang="en-US"/>
           </a:p>
@@ -2637,7 +2637,7 @@
           <a:p>
             <a:fld id="{E9CC885B-4903-4D54-9A93-00025F12DED9}" type="datetimeFigureOut">
               <a:rPr kumimoji="1" lang="ja-JP" altLang="en-US" smtClean="0"/>
-              <a:t>2025/1/6</a:t>
+              <a:t>2026/3/18</a:t>
             </a:fld>
             <a:endParaRPr kumimoji="1" lang="ja-JP" altLang="en-US"/>
           </a:p>
@@ -2925,7 +2925,7 @@
           <a:p>
             <a:fld id="{E9CC885B-4903-4D54-9A93-00025F12DED9}" type="datetimeFigureOut">
               <a:rPr kumimoji="1" lang="ja-JP" altLang="en-US" smtClean="0"/>
-              <a:t>2025/1/6</a:t>
+              <a:t>2026/3/18</a:t>
             </a:fld>
             <a:endParaRPr kumimoji="1" lang="ja-JP" altLang="en-US"/>
           </a:p>
@@ -3198,7 +3198,7 @@
           <a:p>
             <a:fld id="{E9CC885B-4903-4D54-9A93-00025F12DED9}" type="datetimeFigureOut">
               <a:rPr kumimoji="1" lang="ja-JP" altLang="en-US" smtClean="0"/>
-              <a:t>2025/1/6</a:t>
+              <a:t>2026/3/18</a:t>
             </a:fld>
             <a:endParaRPr kumimoji="1" lang="ja-JP" altLang="en-US"/>
           </a:p>
@@ -3630,7 +3630,7 @@
         <p:spPr>
           <a:xfrm>
             <a:off x="567542" y="491954"/>
-            <a:ext cx="5226111" cy="584775"/>
+            <a:ext cx="5636479" cy="584775"/>
           </a:xfrm>
           <a:prstGeom prst="rect">
             <a:avLst/>
@@ -3645,7 +3645,7 @@
           <a:p>
             <a:r>
               <a:rPr kumimoji="1" lang="ja-JP" altLang="en-US" sz="3200" b="1" u="sng" dirty="0"/>
-              <a:t>矩形と点の当たり判定 課題</a:t>
+              <a:t>矩形と点の当たり判定 課題１</a:t>
             </a:r>
           </a:p>
         </p:txBody>
@@ -3889,7 +3889,7 @@
         <p:spPr>
           <a:xfrm>
             <a:off x="567542" y="491954"/>
-            <a:ext cx="5226111" cy="584775"/>
+            <a:ext cx="5636479" cy="584775"/>
           </a:xfrm>
           <a:prstGeom prst="rect">
             <a:avLst/>
@@ -3904,7 +3904,7 @@
           <a:p>
             <a:r>
               <a:rPr kumimoji="1" lang="ja-JP" altLang="en-US" sz="3200" b="1" u="sng" dirty="0"/>
-              <a:t>矩形と点の当たり判定 課題</a:t>
+              <a:t>矩形と点の当たり判定 課題２</a:t>
             </a:r>
           </a:p>
         </p:txBody>
@@ -3924,7 +3924,7 @@
         <p:spPr>
           <a:xfrm>
             <a:off x="567542" y="1216429"/>
-            <a:ext cx="9390712" cy="4154984"/>
+            <a:ext cx="9390712" cy="3785652"/>
           </a:xfrm>
           <a:prstGeom prst="rect">
             <a:avLst/>
@@ -3980,7 +3980,7 @@
           <a:p>
             <a:r>
               <a:rPr kumimoji="1" lang="ja-JP" altLang="en-US" sz="2400" dirty="0"/>
-              <a:t>あたったら、</a:t>
+              <a:t>当たったら、</a:t>
             </a:r>
             <a:r>
               <a:rPr kumimoji="1" lang="en-US" altLang="ja-JP" sz="2400" dirty="0"/>
@@ -4042,12 +4042,13 @@
           <a:p>
             <a:r>
               <a:rPr lang="ja-JP" altLang="en-US" sz="2400" dirty="0"/>
-              <a:t>から確認できます。</a:t>
+              <a:t>から確認</a:t>
+            </a:r>
+            <a:r>
+              <a:rPr lang="ja-JP" altLang="en-US" sz="2400"/>
+              <a:t>できます。</a:t>
             </a:r>
             <a:endParaRPr lang="en-US" altLang="ja-JP" sz="2400" dirty="0"/>
-          </a:p>
-          <a:p>
-            <a:endParaRPr kumimoji="1" lang="en-US" altLang="ja-JP" sz="2400" dirty="0"/>
           </a:p>
         </p:txBody>
       </p:sp>
